--- a/Marhaba.pptx
+++ b/Marhaba.pptx
@@ -22223,7 +22223,7 @@
                 <a:ea typeface="Advent Pro"/>
                 <a:cs typeface="Advent Pro"/>
               </a:rPr>
-              <a:t>Paiement à la livraison</a:t>
+              <a:t>Paiement flexible</a:t>
             </a:r>
             <a:endParaRPr sz="2000" b="1" dirty="0">
               <a:solidFill>
@@ -22727,7 +22727,7 @@
                   <a:schemeClr val="tx1"/>
                 </a:solidFill>
               </a:rPr>
-              <a:t>Le client paie en espèces (cash) à la livraison</a:t>
+              <a:t>Le client peut payer en cash ou par carte selon son choix</a:t>
             </a:r>
           </a:p>
           <a:p>
